--- a/ppt/X25142224_ski-resort-avalanche-safety.pptx
+++ b/ppt/X25142224_ski-resort-avalanche-safety.pptx
@@ -3101,8 +3101,8 @@
         </p:nvSpPr>
         <p:spPr>
           <a:xfrm>
-            <a:off x="11140135" y="0"/>
-            <a:ext cx="1051560" cy="6858000"/>
+            <a:off x="-91440" y="-91440"/>
+            <a:ext cx="12435840" cy="7040880"/>
           </a:xfrm>
           <a:prstGeom prst="rect">
             <a:avLst/>
@@ -3145,8 +3145,8 @@
         </p:nvSpPr>
         <p:spPr>
           <a:xfrm>
-            <a:off x="777240" y="2286000"/>
-            <a:ext cx="9875520" cy="1554480"/>
+            <a:off x="5852160" y="91440"/>
+            <a:ext cx="6583680" cy="4572000"/>
           </a:xfrm>
           <a:prstGeom prst="rect">
             <a:avLst/>
@@ -3159,15 +3159,15 @@
           </a:bodyPr>
           <a:lstStyle/>
           <a:p>
-            <a:pPr algn="l"/>
-            <a:r>
-              <a:rPr sz="4000" b="1">
-                <a:solidFill>
-                  <a:srgbClr val="2F6AA3"/>
+            <a:pPr algn="r"/>
+            <a:r>
+              <a:rPr sz="34000" b="1" i="0">
+                <a:solidFill>
+                  <a:srgbClr val="4C7EAF"/>
                 </a:solidFill>
                 <a:latin typeface="Tahoma"/>
               </a:rPr>
-              <a:t>Ski Resort Avalanche Safety</a:t>
+              <a:t>SR</a:t>
             </a:r>
           </a:p>
         </p:txBody>
@@ -3180,14 +3180,14 @@
         </p:nvSpPr>
         <p:spPr>
           <a:xfrm>
-            <a:off x="804672" y="3703320"/>
-            <a:ext cx="3291840" cy="45720"/>
+            <a:off x="822960" y="2148840"/>
+            <a:ext cx="1554480" cy="82296"/>
           </a:xfrm>
           <a:prstGeom prst="rect">
             <a:avLst/>
           </a:prstGeom>
           <a:solidFill>
-            <a:srgbClr val="2F6AA3"/>
+            <a:srgbClr val="FFFFFF"/>
           </a:solidFill>
           <a:ln>
             <a:noFill/>
@@ -3224,8 +3224,8 @@
         </p:nvSpPr>
         <p:spPr>
           <a:xfrm>
-            <a:off x="804672" y="3931920"/>
-            <a:ext cx="9692640" cy="2194560"/>
+            <a:off x="777240" y="2377440"/>
+            <a:ext cx="7498079" cy="2103120"/>
           </a:xfrm>
           <a:prstGeom prst="rect">
             <a:avLst/>
@@ -3240,33 +3240,103 @@
           <a:p>
             <a:pPr algn="l"/>
             <a:r>
-              <a:rPr sz="1800" b="0">
-                <a:solidFill>
-                  <a:srgbClr val="5C655F"/>
+              <a:rPr sz="3400" b="1" i="0">
+                <a:solidFill>
+                  <a:srgbClr val="FFFFFF"/>
+                </a:solidFill>
+                <a:latin typeface="Tahoma"/>
+              </a:rPr>
+              <a:t>Ski Resort Avalanche Safety</a:t>
+            </a:r>
+          </a:p>
+        </p:txBody>
+      </p:sp>
+      <p:sp>
+        <p:nvSpPr>
+          <p:cNvPr id="6" name="TextBox 5"/>
+          <p:cNvSpPr txBox="1"/>
+          <p:nvPr/>
+        </p:nvSpPr>
+        <p:spPr>
+          <a:xfrm>
+            <a:off x="822960" y="4160520"/>
+            <a:ext cx="7315200" cy="640080"/>
+          </a:xfrm>
+          <a:prstGeom prst="rect">
+            <a:avLst/>
+          </a:prstGeom>
+          <a:noFill/>
+        </p:spPr>
+        <p:txBody>
+          <a:bodyPr wrap="square" anchor="t">
+            <a:spAutoFit/>
+          </a:bodyPr>
+          <a:lstStyle/>
+          <a:p>
+            <a:pPr algn="l"/>
+            <a:r>
+              <a:rPr sz="1700" b="0" i="1">
+                <a:solidFill>
+                  <a:srgbClr val="D1DEEA"/>
                 </a:solidFill>
                 <a:latin typeface="Calibri"/>
               </a:rPr>
               <a:t>A fog-to-cloud slope-monitoring pipeline, deployed live on AWS</a:t>
             </a:r>
           </a:p>
+        </p:txBody>
+      </p:sp>
+      <p:sp>
+        <p:nvSpPr>
+          <p:cNvPr id="7" name="TextBox 6"/>
+          <p:cNvSpPr txBox="1"/>
+          <p:nvPr/>
+        </p:nvSpPr>
+        <p:spPr>
+          <a:xfrm>
+            <a:off x="822960" y="4983480"/>
+            <a:ext cx="7863840" cy="1371600"/>
+          </a:xfrm>
+          <a:prstGeom prst="rect">
+            <a:avLst/>
+          </a:prstGeom>
+          <a:noFill/>
+        </p:spPr>
+        <p:txBody>
+          <a:bodyPr wrap="square" anchor="t">
+            <a:spAutoFit/>
+          </a:bodyPr>
+          <a:lstStyle/>
           <a:p>
             <a:pPr algn="l"/>
             <a:r>
-              <a:rPr sz="1600" b="1">
-                <a:solidFill>
-                  <a:srgbClr val="232A26"/>
+              <a:rPr sz="1700" b="1" i="0">
+                <a:solidFill>
+                  <a:srgbClr val="FFFFFF"/>
                 </a:solidFill>
                 <a:latin typeface="Calibri"/>
               </a:rPr>
-              <a:t>Ebin Joseph    Student ID X25142224</a:t>
+              <a:t>Ebin Joseph</a:t>
             </a:r>
           </a:p>
           <a:p>
             <a:pPr algn="l"/>
             <a:r>
-              <a:rPr sz="1300" b="0">
-                <a:solidFill>
-                  <a:srgbClr val="5C655F"/>
+              <a:rPr sz="1300" b="0" i="0">
+                <a:solidFill>
+                  <a:srgbClr val="BCCFE1"/>
+                </a:solidFill>
+                <a:latin typeface="Calibri"/>
+              </a:rPr>
+              <a:t>Student ID X25142224</a:t>
+            </a:r>
+          </a:p>
+          <a:p>
+            <a:pPr algn="l"/>
+            <a:r>
+              <a:rPr sz="1250" b="0" i="0">
+                <a:solidFill>
+                  <a:srgbClr val="BCCFE1"/>
                 </a:solidFill>
                 <a:latin typeface="Calibri"/>
               </a:rPr>
@@ -3276,9 +3346,9 @@
           <a:p>
             <a:pPr algn="l"/>
             <a:r>
-              <a:rPr sz="1300" b="0">
-                <a:solidFill>
-                  <a:srgbClr val="5C655F"/>
+              <a:rPr sz="1250" b="0" i="0">
+                <a:solidFill>
+                  <a:srgbClr val="BCCFE1"/>
                 </a:solidFill>
                 <a:latin typeface="Calibri"/>
               </a:rPr>
@@ -3573,7 +3643,7 @@
           <a:p>
             <a:pPr algn="ctr"/>
             <a:r>
-              <a:rPr sz="2600" b="1">
+              <a:rPr sz="2600" b="1" i="0">
                 <a:solidFill>
                   <a:srgbClr val="FFFFFF"/>
                 </a:solidFill>
@@ -3866,7 +3936,7 @@
           <a:p>
             <a:pPr algn="ctr"/>
             <a:r>
-              <a:rPr sz="2600" b="1">
+              <a:rPr sz="2600" b="1" i="0">
                 <a:solidFill>
                   <a:srgbClr val="FFFFFF"/>
                 </a:solidFill>
@@ -4167,7 +4237,7 @@
           <a:p>
             <a:pPr algn="ctr"/>
             <a:r>
-              <a:rPr sz="2600" b="1">
+              <a:rPr sz="2600" b="1" i="0">
                 <a:solidFill>
                   <a:srgbClr val="FFFFFF"/>
                 </a:solidFill>
@@ -4564,7 +4634,7 @@
           <a:p>
             <a:pPr algn="ctr"/>
             <a:r>
-              <a:rPr sz="2600" b="1">
+              <a:rPr sz="2600" b="1" i="0">
                 <a:solidFill>
                   <a:srgbClr val="FFFFFF"/>
                 </a:solidFill>
@@ -4825,7 +4895,7 @@
           <a:p>
             <a:pPr algn="ctr"/>
             <a:r>
-              <a:rPr sz="2600" b="1">
+              <a:rPr sz="2600" b="1" i="0">
                 <a:solidFill>
                   <a:srgbClr val="FFFFFF"/>
                 </a:solidFill>

--- a/ppt/X25142224_ski-resort-avalanche-safety.pptx
+++ b/ppt/X25142224_ski-resort-avalanche-safety.pptx
@@ -3139,48 +3139,13 @@
       </p:sp>
       <p:sp>
         <p:nvSpPr>
-          <p:cNvPr id="3" name="TextBox 2"/>
-          <p:cNvSpPr txBox="1"/>
-          <p:nvPr/>
-        </p:nvSpPr>
-        <p:spPr>
-          <a:xfrm>
-            <a:off x="5852160" y="91440"/>
-            <a:ext cx="6583680" cy="4572000"/>
-          </a:xfrm>
-          <a:prstGeom prst="rect">
-            <a:avLst/>
-          </a:prstGeom>
-          <a:noFill/>
-        </p:spPr>
-        <p:txBody>
-          <a:bodyPr wrap="square" anchor="t">
-            <a:spAutoFit/>
-          </a:bodyPr>
-          <a:lstStyle/>
-          <a:p>
-            <a:pPr algn="r"/>
-            <a:r>
-              <a:rPr sz="34000" b="1" i="0">
-                <a:solidFill>
-                  <a:srgbClr val="4C7EAF"/>
-                </a:solidFill>
-                <a:latin typeface="Tahoma"/>
-              </a:rPr>
-              <a:t>SR</a:t>
-            </a:r>
-          </a:p>
-        </p:txBody>
-      </p:sp>
-      <p:sp>
-        <p:nvSpPr>
-          <p:cNvPr id="4" name="Rectangle 3"/>
+          <p:cNvPr id="3" name="Rectangle 2"/>
           <p:cNvSpPr/>
           <p:nvPr/>
         </p:nvSpPr>
         <p:spPr>
           <a:xfrm>
-            <a:off x="822960" y="2148840"/>
+            <a:off x="9811512" y="1965960"/>
             <a:ext cx="1554480" cy="82296"/>
           </a:xfrm>
           <a:prstGeom prst="rect">
@@ -3218,14 +3183,14 @@
       </p:sp>
       <p:sp>
         <p:nvSpPr>
-          <p:cNvPr id="5" name="TextBox 4"/>
+          <p:cNvPr id="4" name="TextBox 3"/>
           <p:cNvSpPr txBox="1"/>
           <p:nvPr/>
         </p:nvSpPr>
         <p:spPr>
           <a:xfrm>
-            <a:off x="777240" y="2377440"/>
-            <a:ext cx="7498079" cy="2103120"/>
+            <a:off x="3200400" y="2194560"/>
+            <a:ext cx="8165592" cy="2103120"/>
           </a:xfrm>
           <a:prstGeom prst="rect">
             <a:avLst/>
@@ -3238,7 +3203,7 @@
           </a:bodyPr>
           <a:lstStyle/>
           <a:p>
-            <a:pPr algn="l"/>
+            <a:pPr algn="r"/>
             <a:r>
               <a:rPr sz="3400" b="1" i="0">
                 <a:solidFill>
@@ -3253,14 +3218,14 @@
       </p:sp>
       <p:sp>
         <p:nvSpPr>
-          <p:cNvPr id="6" name="TextBox 5"/>
+          <p:cNvPr id="5" name="TextBox 4"/>
           <p:cNvSpPr txBox="1"/>
           <p:nvPr/>
         </p:nvSpPr>
         <p:spPr>
           <a:xfrm>
-            <a:off x="822960" y="4160520"/>
-            <a:ext cx="7315200" cy="640080"/>
+            <a:off x="4023360" y="4069080"/>
+            <a:ext cx="7342631" cy="640080"/>
           </a:xfrm>
           <a:prstGeom prst="rect">
             <a:avLst/>
@@ -3273,7 +3238,7 @@
           </a:bodyPr>
           <a:lstStyle/>
           <a:p>
-            <a:pPr algn="l"/>
+            <a:pPr algn="r"/>
             <a:r>
               <a:rPr sz="1700" b="0" i="1">
                 <a:solidFill>
@@ -3288,14 +3253,14 @@
       </p:sp>
       <p:sp>
         <p:nvSpPr>
-          <p:cNvPr id="7" name="TextBox 6"/>
+          <p:cNvPr id="6" name="TextBox 5"/>
           <p:cNvSpPr txBox="1"/>
           <p:nvPr/>
         </p:nvSpPr>
         <p:spPr>
           <a:xfrm>
-            <a:off x="822960" y="4983480"/>
-            <a:ext cx="7863840" cy="1371600"/>
+            <a:off x="3566160" y="4892040"/>
+            <a:ext cx="7799831" cy="1371600"/>
           </a:xfrm>
           <a:prstGeom prst="rect">
             <a:avLst/>
@@ -3308,7 +3273,7 @@
           </a:bodyPr>
           <a:lstStyle/>
           <a:p>
-            <a:pPr algn="l"/>
+            <a:pPr algn="r"/>
             <a:r>
               <a:rPr sz="1700" b="1" i="0">
                 <a:solidFill>
@@ -3320,7 +3285,7 @@
             </a:r>
           </a:p>
           <a:p>
-            <a:pPr algn="l"/>
+            <a:pPr algn="r"/>
             <a:r>
               <a:rPr sz="1300" b="0" i="0">
                 <a:solidFill>
@@ -3332,7 +3297,7 @@
             </a:r>
           </a:p>
           <a:p>
-            <a:pPr algn="l"/>
+            <a:pPr algn="r"/>
             <a:r>
               <a:rPr sz="1250" b="0" i="0">
                 <a:solidFill>
@@ -3344,7 +3309,7 @@
             </a:r>
           </a:p>
           <a:p>
-            <a:pPr algn="l"/>
+            <a:pPr algn="r"/>
             <a:r>
               <a:rPr sz="1250" b="0" i="0">
                 <a:solidFill>
